--- a/cover/cover.pptx
+++ b/cover/cover.pptx
@@ -2778,9 +2778,14 @@
 <p:sldMaster xmlns:a="http://schemas.openxmlformats.org/drawingml/2006/main" xmlns:r="http://schemas.openxmlformats.org/officeDocument/2006/relationships" xmlns:p="http://schemas.openxmlformats.org/presentationml/2006/main">
   <p:cSld>
     <p:bg>
-      <p:bgRef idx="1001">
-        <a:schemeClr val="bg1"/>
-      </p:bgRef>
+      <p:bgPr>
+        <a:solidFill>
+          <a:schemeClr val="bg1">
+            <a:alpha val="0"/>
+          </a:schemeClr>
+        </a:solidFill>
+        <a:effectLst/>
+      </p:bgPr>
     </p:bg>
     <p:spTree>
       <p:nvGrpSpPr>
@@ -3320,7 +3325,9 @@
     <p:bg>
       <p:bgPr>
         <a:solidFill>
-          <a:srgbClr val="212A2E"/>
+          <a:schemeClr val="accent1">
+            <a:alpha val="0"/>
+          </a:schemeClr>
         </a:solidFill>
         <a:effectLst/>
       </p:bgPr>
@@ -3451,7 +3458,9 @@
     <p:bg>
       <p:bgPr>
         <a:solidFill>
-          <a:srgbClr val="212A2E"/>
+          <a:schemeClr val="accent1">
+            <a:alpha val="0"/>
+          </a:schemeClr>
         </a:solidFill>
         <a:effectLst/>
       </p:bgPr>
@@ -3628,7 +3637,9 @@
     <p:bg>
       <p:bgPr>
         <a:solidFill>
-          <a:srgbClr val="212A2E"/>
+          <a:schemeClr val="accent1">
+            <a:alpha val="0"/>
+          </a:schemeClr>
         </a:solidFill>
         <a:effectLst/>
       </p:bgPr>
@@ -3719,7 +3730,9 @@
     <p:bg>
       <p:bgPr>
         <a:solidFill>
-          <a:srgbClr val="212A2E"/>
+          <a:schemeClr val="accent1">
+            <a:alpha val="0"/>
+          </a:schemeClr>
         </a:solidFill>
         <a:effectLst/>
       </p:bgPr>
@@ -3792,7 +3805,9 @@
     <p:bg>
       <p:bgPr>
         <a:solidFill>
-          <a:srgbClr val="212A2E"/>
+          <a:schemeClr val="accent1">
+            <a:alpha val="0"/>
+          </a:schemeClr>
         </a:solidFill>
         <a:effectLst/>
       </p:bgPr>
@@ -4035,7 +4050,9 @@
     <p:bg>
       <p:bgPr>
         <a:solidFill>
-          <a:srgbClr val="718A91"/>
+          <a:schemeClr val="accent1">
+            <a:alpha val="0"/>
+          </a:schemeClr>
         </a:solidFill>
         <a:effectLst/>
       </p:bgPr>
@@ -4184,7 +4201,9 @@
     <p:bg>
       <p:bgPr>
         <a:solidFill>
-          <a:srgbClr val="718A91"/>
+          <a:schemeClr val="accent1">
+            <a:alpha val="0"/>
+          </a:schemeClr>
         </a:solidFill>
         <a:effectLst/>
       </p:bgPr>
@@ -4381,7 +4400,9 @@
     <p:bg>
       <p:bgPr>
         <a:solidFill>
-          <a:srgbClr val="718A91"/>
+          <a:schemeClr val="accent1">
+            <a:alpha val="0"/>
+          </a:schemeClr>
         </a:solidFill>
         <a:effectLst/>
       </p:bgPr>
